--- a/docs/ai-coding-showcase.pptx
+++ b/docs/ai-coding-showcase.pptx
@@ -4,20 +4,23 @@
   <p:sldMasterIdLst>
     <p:sldMasterId id="2147483648" r:id="rId1"/>
   </p:sldMasterIdLst>
+  <p:notesMasterIdLst>
+    <p:notesMasterId r:id="rId13"/>
+  </p:notesMasterIdLst>
   <p:sldIdLst>
-    <p:sldId id="256" r:id="rId7"/>
-    <p:sldId id="257" r:id="rId8"/>
-    <p:sldId id="258" r:id="rId9"/>
-    <p:sldId id="259" r:id="rId10"/>
-    <p:sldId id="260" r:id="rId11"/>
-    <p:sldId id="261" r:id="rId12"/>
-    <p:sldId id="262" r:id="rId13"/>
-    <p:sldId id="263" r:id="rId14"/>
-    <p:sldId id="264" r:id="rId15"/>
-    <p:sldId id="265" r:id="rId16"/>
-    <p:sldId id="266" r:id="rId17"/>
+    <p:sldId id="256" r:id="rId2"/>
+    <p:sldId id="257" r:id="rId3"/>
+    <p:sldId id="258" r:id="rId4"/>
+    <p:sldId id="259" r:id="rId5"/>
+    <p:sldId id="260" r:id="rId6"/>
+    <p:sldId id="261" r:id="rId7"/>
+    <p:sldId id="262" r:id="rId8"/>
+    <p:sldId id="263" r:id="rId9"/>
+    <p:sldId id="264" r:id="rId10"/>
+    <p:sldId id="265" r:id="rId11"/>
+    <p:sldId id="266" r:id="rId12"/>
   </p:sldIdLst>
-  <p:sldSz cx="12191695" cy="6858000" type="screen4x3"/>
+  <p:sldSz cx="12192000" cy="6858000"/>
   <p:notesSz cx="6858000" cy="9144000"/>
   <p:defaultTextStyle>
     <a:defPPr>
@@ -114,7 +117,456 @@
       </a:defRPr>
     </a:lvl9pPr>
   </p:defaultTextStyle>
+  <p:extLst>
+    <p:ext uri="{EFAFB233-063F-42B5-8137-9DF3F51BA10A}">
+      <p15:sldGuideLst xmlns:p15="http://schemas.microsoft.com/office/powerpoint/2012/main">
+        <p15:guide id="1" orient="horz" pos="2160">
+          <p15:clr>
+            <a:srgbClr val="A4A3A4"/>
+          </p15:clr>
+        </p15:guide>
+        <p15:guide id="2" pos="2880">
+          <p15:clr>
+            <a:srgbClr val="A4A3A4"/>
+          </p15:clr>
+        </p15:guide>
+      </p15:sldGuideLst>
+    </p:ext>
+  </p:extLst>
 </p:presentation>
+</file>
+
+<file path=ppt/notesMasters/notesMaster1.xml><?xml version="1.0" encoding="utf-8"?>
+<p:notesMaster xmlns:a="http://schemas.openxmlformats.org/drawingml/2006/main" xmlns:r="http://schemas.openxmlformats.org/officeDocument/2006/relationships" xmlns:p="http://schemas.openxmlformats.org/presentationml/2006/main">
+  <p:cSld>
+    <p:bg>
+      <p:bgRef idx="1001">
+        <a:schemeClr val="bg1"/>
+      </p:bgRef>
+    </p:bg>
+    <p:spTree>
+      <p:nvGrpSpPr>
+        <p:cNvPr id="1" name=""/>
+        <p:cNvGrpSpPr/>
+        <p:nvPr/>
+      </p:nvGrpSpPr>
+      <p:grpSpPr>
+        <a:xfrm>
+          <a:off x="0" y="0"/>
+          <a:ext cx="0" cy="0"/>
+          <a:chOff x="0" y="0"/>
+          <a:chExt cx="0" cy="0"/>
+        </a:xfrm>
+      </p:grpSpPr>
+      <p:sp>
+        <p:nvSpPr>
+          <p:cNvPr id="2" name="页眉占位符 1"/>
+          <p:cNvSpPr>
+            <a:spLocks noGrp="1"/>
+          </p:cNvSpPr>
+          <p:nvPr>
+            <p:ph type="hdr" sz="quarter"/>
+          </p:nvPr>
+        </p:nvSpPr>
+        <p:spPr>
+          <a:xfrm>
+            <a:off x="0" y="0"/>
+            <a:ext cx="2971800" cy="458788"/>
+          </a:xfrm>
+          <a:prstGeom prst="rect">
+            <a:avLst/>
+          </a:prstGeom>
+        </p:spPr>
+        <p:txBody>
+          <a:bodyPr vert="horz" lIns="91440" tIns="45720" rIns="91440" bIns="45720" rtlCol="0"/>
+          <a:lstStyle>
+            <a:lvl1pPr algn="l">
+              <a:defRPr sz="1200"/>
+            </a:lvl1pPr>
+          </a:lstStyle>
+          <a:p>
+            <a:endParaRPr lang="zh-CN" altLang="en-US"/>
+          </a:p>
+        </p:txBody>
+      </p:sp>
+      <p:sp>
+        <p:nvSpPr>
+          <p:cNvPr id="3" name="日期占位符 2"/>
+          <p:cNvSpPr>
+            <a:spLocks noGrp="1"/>
+          </p:cNvSpPr>
+          <p:nvPr>
+            <p:ph type="dt" idx="1"/>
+          </p:nvPr>
+        </p:nvSpPr>
+        <p:spPr>
+          <a:xfrm>
+            <a:off x="3884613" y="0"/>
+            <a:ext cx="2971800" cy="458788"/>
+          </a:xfrm>
+          <a:prstGeom prst="rect">
+            <a:avLst/>
+          </a:prstGeom>
+        </p:spPr>
+        <p:txBody>
+          <a:bodyPr vert="horz" lIns="91440" tIns="45720" rIns="91440" bIns="45720" rtlCol="0"/>
+          <a:lstStyle>
+            <a:lvl1pPr algn="r">
+              <a:defRPr sz="1200"/>
+            </a:lvl1pPr>
+          </a:lstStyle>
+          <a:p>
+            <a:fld id="{2BA51DEB-BC8F-4DE4-B311-1B1E56475C59}" type="datetimeFigureOut">
+              <a:rPr lang="zh-CN" altLang="en-US" smtClean="0"/>
+              <a:t>2026/3/17</a:t>
+            </a:fld>
+            <a:endParaRPr lang="zh-CN" altLang="en-US"/>
+          </a:p>
+        </p:txBody>
+      </p:sp>
+      <p:sp>
+        <p:nvSpPr>
+          <p:cNvPr id="4" name="幻灯片图像占位符 3"/>
+          <p:cNvSpPr>
+            <a:spLocks noGrp="1" noRot="1" noChangeAspect="1"/>
+          </p:cNvSpPr>
+          <p:nvPr>
+            <p:ph type="sldImg" idx="2"/>
+          </p:nvPr>
+        </p:nvSpPr>
+        <p:spPr>
+          <a:xfrm>
+            <a:off x="685800" y="1143000"/>
+            <a:ext cx="5486400" cy="3086100"/>
+          </a:xfrm>
+          <a:prstGeom prst="rect">
+            <a:avLst/>
+          </a:prstGeom>
+          <a:noFill/>
+          <a:ln w="12700">
+            <a:solidFill>
+              <a:prstClr val="black"/>
+            </a:solidFill>
+          </a:ln>
+        </p:spPr>
+        <p:txBody>
+          <a:bodyPr vert="horz" lIns="91440" tIns="45720" rIns="91440" bIns="45720" rtlCol="0" anchor="ctr"/>
+          <a:lstStyle/>
+          <a:p>
+            <a:endParaRPr lang="zh-CN" altLang="en-US"/>
+          </a:p>
+        </p:txBody>
+      </p:sp>
+      <p:sp>
+        <p:nvSpPr>
+          <p:cNvPr id="5" name="备注占位符 4"/>
+          <p:cNvSpPr>
+            <a:spLocks noGrp="1"/>
+          </p:cNvSpPr>
+          <p:nvPr>
+            <p:ph type="body" sz="quarter" idx="3"/>
+          </p:nvPr>
+        </p:nvSpPr>
+        <p:spPr>
+          <a:xfrm>
+            <a:off x="685800" y="4400550"/>
+            <a:ext cx="5486400" cy="3600450"/>
+          </a:xfrm>
+          <a:prstGeom prst="rect">
+            <a:avLst/>
+          </a:prstGeom>
+        </p:spPr>
+        <p:txBody>
+          <a:bodyPr vert="horz" lIns="91440" tIns="45720" rIns="91440" bIns="45720" rtlCol="0"/>
+          <a:lstStyle/>
+          <a:p>
+            <a:pPr lvl="0"/>
+            <a:r>
+              <a:rPr lang="zh-CN" altLang="en-US"/>
+              <a:t>单击此处编辑母版文本样式</a:t>
+            </a:r>
+          </a:p>
+          <a:p>
+            <a:pPr lvl="1"/>
+            <a:r>
+              <a:rPr lang="zh-CN" altLang="en-US"/>
+              <a:t>二级</a:t>
+            </a:r>
+          </a:p>
+          <a:p>
+            <a:pPr lvl="2"/>
+            <a:r>
+              <a:rPr lang="zh-CN" altLang="en-US"/>
+              <a:t>三级</a:t>
+            </a:r>
+          </a:p>
+          <a:p>
+            <a:pPr lvl="3"/>
+            <a:r>
+              <a:rPr lang="zh-CN" altLang="en-US"/>
+              <a:t>四级</a:t>
+            </a:r>
+          </a:p>
+          <a:p>
+            <a:pPr lvl="4"/>
+            <a:r>
+              <a:rPr lang="zh-CN" altLang="en-US"/>
+              <a:t>五级</a:t>
+            </a:r>
+          </a:p>
+        </p:txBody>
+      </p:sp>
+      <p:sp>
+        <p:nvSpPr>
+          <p:cNvPr id="6" name="页脚占位符 5"/>
+          <p:cNvSpPr>
+            <a:spLocks noGrp="1"/>
+          </p:cNvSpPr>
+          <p:nvPr>
+            <p:ph type="ftr" sz="quarter" idx="4"/>
+          </p:nvPr>
+        </p:nvSpPr>
+        <p:spPr>
+          <a:xfrm>
+            <a:off x="0" y="8685213"/>
+            <a:ext cx="2971800" cy="458787"/>
+          </a:xfrm>
+          <a:prstGeom prst="rect">
+            <a:avLst/>
+          </a:prstGeom>
+        </p:spPr>
+        <p:txBody>
+          <a:bodyPr vert="horz" lIns="91440" tIns="45720" rIns="91440" bIns="45720" rtlCol="0" anchor="b"/>
+          <a:lstStyle>
+            <a:lvl1pPr algn="l">
+              <a:defRPr sz="1200"/>
+            </a:lvl1pPr>
+          </a:lstStyle>
+          <a:p>
+            <a:endParaRPr lang="zh-CN" altLang="en-US"/>
+          </a:p>
+        </p:txBody>
+      </p:sp>
+      <p:sp>
+        <p:nvSpPr>
+          <p:cNvPr id="7" name="灯片编号占位符 6"/>
+          <p:cNvSpPr>
+            <a:spLocks noGrp="1"/>
+          </p:cNvSpPr>
+          <p:nvPr>
+            <p:ph type="sldNum" sz="quarter" idx="5"/>
+          </p:nvPr>
+        </p:nvSpPr>
+        <p:spPr>
+          <a:xfrm>
+            <a:off x="3884613" y="8685213"/>
+            <a:ext cx="2971800" cy="458787"/>
+          </a:xfrm>
+          <a:prstGeom prst="rect">
+            <a:avLst/>
+          </a:prstGeom>
+        </p:spPr>
+        <p:txBody>
+          <a:bodyPr vert="horz" lIns="91440" tIns="45720" rIns="91440" bIns="45720" rtlCol="0" anchor="b"/>
+          <a:lstStyle>
+            <a:lvl1pPr algn="r">
+              <a:defRPr sz="1200"/>
+            </a:lvl1pPr>
+          </a:lstStyle>
+          <a:p>
+            <a:fld id="{410DA9F0-E4E3-4176-8284-72406948C67B}" type="slidenum">
+              <a:rPr lang="zh-CN" altLang="en-US" smtClean="0"/>
+              <a:t>‹#›</a:t>
+            </a:fld>
+            <a:endParaRPr lang="zh-CN" altLang="en-US"/>
+          </a:p>
+        </p:txBody>
+      </p:sp>
+    </p:spTree>
+    <p:extLst>
+      <p:ext uri="{BB962C8B-B14F-4D97-AF65-F5344CB8AC3E}">
+        <p14:creationId xmlns:p14="http://schemas.microsoft.com/office/powerpoint/2010/main" val="3986901204"/>
+      </p:ext>
+    </p:extLst>
+  </p:cSld>
+  <p:clrMap bg1="lt1" tx1="dk1" bg2="lt2" tx2="dk2" accent1="accent1" accent2="accent2" accent3="accent3" accent4="accent4" accent5="accent5" accent6="accent6" hlink="hlink" folHlink="folHlink"/>
+  <p:notesStyle>
+    <a:lvl1pPr marL="0" algn="l" defTabSz="914400" rtl="0" eaLnBrk="1" latinLnBrk="0" hangingPunct="1">
+      <a:defRPr sz="1200" kern="1200">
+        <a:solidFill>
+          <a:schemeClr val="tx1"/>
+        </a:solidFill>
+        <a:latin typeface="+mn-lt"/>
+        <a:ea typeface="+mn-ea"/>
+        <a:cs typeface="+mn-cs"/>
+      </a:defRPr>
+    </a:lvl1pPr>
+    <a:lvl2pPr marL="457200" algn="l" defTabSz="914400" rtl="0" eaLnBrk="1" latinLnBrk="0" hangingPunct="1">
+      <a:defRPr sz="1200" kern="1200">
+        <a:solidFill>
+          <a:schemeClr val="tx1"/>
+        </a:solidFill>
+        <a:latin typeface="+mn-lt"/>
+        <a:ea typeface="+mn-ea"/>
+        <a:cs typeface="+mn-cs"/>
+      </a:defRPr>
+    </a:lvl2pPr>
+    <a:lvl3pPr marL="914400" algn="l" defTabSz="914400" rtl="0" eaLnBrk="1" latinLnBrk="0" hangingPunct="1">
+      <a:defRPr sz="1200" kern="1200">
+        <a:solidFill>
+          <a:schemeClr val="tx1"/>
+        </a:solidFill>
+        <a:latin typeface="+mn-lt"/>
+        <a:ea typeface="+mn-ea"/>
+        <a:cs typeface="+mn-cs"/>
+      </a:defRPr>
+    </a:lvl3pPr>
+    <a:lvl4pPr marL="1371600" algn="l" defTabSz="914400" rtl="0" eaLnBrk="1" latinLnBrk="0" hangingPunct="1">
+      <a:defRPr sz="1200" kern="1200">
+        <a:solidFill>
+          <a:schemeClr val="tx1"/>
+        </a:solidFill>
+        <a:latin typeface="+mn-lt"/>
+        <a:ea typeface="+mn-ea"/>
+        <a:cs typeface="+mn-cs"/>
+      </a:defRPr>
+    </a:lvl4pPr>
+    <a:lvl5pPr marL="1828800" algn="l" defTabSz="914400" rtl="0" eaLnBrk="1" latinLnBrk="0" hangingPunct="1">
+      <a:defRPr sz="1200" kern="1200">
+        <a:solidFill>
+          <a:schemeClr val="tx1"/>
+        </a:solidFill>
+        <a:latin typeface="+mn-lt"/>
+        <a:ea typeface="+mn-ea"/>
+        <a:cs typeface="+mn-cs"/>
+      </a:defRPr>
+    </a:lvl5pPr>
+    <a:lvl6pPr marL="2286000" algn="l" defTabSz="914400" rtl="0" eaLnBrk="1" latinLnBrk="0" hangingPunct="1">
+      <a:defRPr sz="1200" kern="1200">
+        <a:solidFill>
+          <a:schemeClr val="tx1"/>
+        </a:solidFill>
+        <a:latin typeface="+mn-lt"/>
+        <a:ea typeface="+mn-ea"/>
+        <a:cs typeface="+mn-cs"/>
+      </a:defRPr>
+    </a:lvl6pPr>
+    <a:lvl7pPr marL="2743200" algn="l" defTabSz="914400" rtl="0" eaLnBrk="1" latinLnBrk="0" hangingPunct="1">
+      <a:defRPr sz="1200" kern="1200">
+        <a:solidFill>
+          <a:schemeClr val="tx1"/>
+        </a:solidFill>
+        <a:latin typeface="+mn-lt"/>
+        <a:ea typeface="+mn-ea"/>
+        <a:cs typeface="+mn-cs"/>
+      </a:defRPr>
+    </a:lvl7pPr>
+    <a:lvl8pPr marL="3200400" algn="l" defTabSz="914400" rtl="0" eaLnBrk="1" latinLnBrk="0" hangingPunct="1">
+      <a:defRPr sz="1200" kern="1200">
+        <a:solidFill>
+          <a:schemeClr val="tx1"/>
+        </a:solidFill>
+        <a:latin typeface="+mn-lt"/>
+        <a:ea typeface="+mn-ea"/>
+        <a:cs typeface="+mn-cs"/>
+      </a:defRPr>
+    </a:lvl8pPr>
+    <a:lvl9pPr marL="3657600" algn="l" defTabSz="914400" rtl="0" eaLnBrk="1" latinLnBrk="0" hangingPunct="1">
+      <a:defRPr sz="1200" kern="1200">
+        <a:solidFill>
+          <a:schemeClr val="tx1"/>
+        </a:solidFill>
+        <a:latin typeface="+mn-lt"/>
+        <a:ea typeface="+mn-ea"/>
+        <a:cs typeface="+mn-cs"/>
+      </a:defRPr>
+    </a:lvl9pPr>
+  </p:notesStyle>
+</p:notesMaster>
+</file>
+
+<file path=ppt/notesSlides/notesSlide1.xml><?xml version="1.0" encoding="utf-8"?>
+<p:notes xmlns:a="http://schemas.openxmlformats.org/drawingml/2006/main" xmlns:r="http://schemas.openxmlformats.org/officeDocument/2006/relationships" xmlns:p="http://schemas.openxmlformats.org/presentationml/2006/main">
+  <p:cSld>
+    <p:spTree>
+      <p:nvGrpSpPr>
+        <p:cNvPr id="1" name=""/>
+        <p:cNvGrpSpPr/>
+        <p:nvPr/>
+      </p:nvGrpSpPr>
+      <p:grpSpPr>
+        <a:xfrm>
+          <a:off x="0" y="0"/>
+          <a:ext cx="0" cy="0"/>
+          <a:chOff x="0" y="0"/>
+          <a:chExt cx="0" cy="0"/>
+        </a:xfrm>
+      </p:grpSpPr>
+      <p:sp>
+        <p:nvSpPr>
+          <p:cNvPr id="2" name="幻灯片图像占位符 1"/>
+          <p:cNvSpPr>
+            <a:spLocks noGrp="1" noRot="1" noChangeAspect="1"/>
+          </p:cNvSpPr>
+          <p:nvPr>
+            <p:ph type="sldImg"/>
+          </p:nvPr>
+        </p:nvSpPr>
+        <p:spPr/>
+      </p:sp>
+      <p:sp>
+        <p:nvSpPr>
+          <p:cNvPr id="3" name="备注占位符 2"/>
+          <p:cNvSpPr>
+            <a:spLocks noGrp="1"/>
+          </p:cNvSpPr>
+          <p:nvPr>
+            <p:ph type="body" idx="1"/>
+          </p:nvPr>
+        </p:nvSpPr>
+        <p:spPr/>
+        <p:txBody>
+          <a:bodyPr/>
+          <a:lstStyle/>
+          <a:p>
+            <a:endParaRPr lang="zh-CN" altLang="en-US" dirty="0"/>
+          </a:p>
+        </p:txBody>
+      </p:sp>
+      <p:sp>
+        <p:nvSpPr>
+          <p:cNvPr id="4" name="灯片编号占位符 3"/>
+          <p:cNvSpPr>
+            <a:spLocks noGrp="1"/>
+          </p:cNvSpPr>
+          <p:nvPr>
+            <p:ph type="sldNum" sz="quarter" idx="5"/>
+          </p:nvPr>
+        </p:nvSpPr>
+        <p:spPr/>
+        <p:txBody>
+          <a:bodyPr/>
+          <a:lstStyle/>
+          <a:p>
+            <a:fld id="{410DA9F0-E4E3-4176-8284-72406948C67B}" type="slidenum">
+              <a:rPr lang="zh-CN" altLang="en-US" smtClean="0"/>
+              <a:t>3</a:t>
+            </a:fld>
+            <a:endParaRPr lang="zh-CN" altLang="en-US"/>
+          </a:p>
+        </p:txBody>
+      </p:sp>
+    </p:spTree>
+    <p:extLst>
+      <p:ext uri="{BB962C8B-B14F-4D97-AF65-F5344CB8AC3E}">
+        <p14:creationId xmlns:p14="http://schemas.microsoft.com/office/powerpoint/2010/main" val="3342829782"/>
+      </p:ext>
+    </p:extLst>
+  </p:cSld>
+  <p:clrMapOvr>
+    <a:masterClrMapping/>
+  </p:clrMapOvr>
+</p:notes>
 </file>
 
 <file path=ppt/slideLayouts/slideLayout1.xml><?xml version="1.0" encoding="utf-8"?>
@@ -155,10 +607,9 @@
           <a:lstStyle/>
           <a:p>
             <a:r>
-              <a:rPr lang="en-US" smtClean="0"/>
+              <a:rPr lang="en-US"/>
               <a:t>Click to edit Master title style</a:t>
             </a:r>
-            <a:endParaRPr lang="en-US"/>
           </a:p>
         </p:txBody>
       </p:sp>
@@ -274,10 +725,9 @@
           </a:lstStyle>
           <a:p>
             <a:r>
-              <a:rPr lang="en-US" smtClean="0"/>
+              <a:rPr lang="en-US"/>
               <a:t>Click to edit Master subtitle style</a:t>
             </a:r>
-            <a:endParaRPr lang="en-US"/>
           </a:p>
         </p:txBody>
       </p:sp>
@@ -298,7 +748,7 @@
           <a:p>
             <a:fld id="{5BCAD085-E8A6-8845-BD4E-CB4CCA059FC4}" type="datetimeFigureOut">
               <a:rPr lang="en-US" smtClean="0"/>
-              <a:t>1/27/13</a:t>
+              <a:t>3/17/2026</a:t>
             </a:fld>
             <a:endParaRPr lang="en-US"/>
           </a:p>
@@ -392,10 +842,9 @@
           <a:lstStyle/>
           <a:p>
             <a:r>
-              <a:rPr lang="en-US" smtClean="0"/>
+              <a:rPr lang="en-US"/>
               <a:t>Click to edit Master title style</a:t>
             </a:r>
-            <a:endParaRPr lang="en-US"/>
           </a:p>
         </p:txBody>
       </p:sp>
@@ -416,38 +865,37 @@
           <a:p>
             <a:pPr lvl="0"/>
             <a:r>
-              <a:rPr lang="en-US" smtClean="0"/>
+              <a:rPr lang="en-US"/>
               <a:t>Click to edit Master text styles</a:t>
             </a:r>
           </a:p>
           <a:p>
             <a:pPr lvl="1"/>
             <a:r>
-              <a:rPr lang="en-US" smtClean="0"/>
+              <a:rPr lang="en-US"/>
               <a:t>Second level</a:t>
             </a:r>
           </a:p>
           <a:p>
             <a:pPr lvl="2"/>
             <a:r>
-              <a:rPr lang="en-US" smtClean="0"/>
+              <a:rPr lang="en-US"/>
               <a:t>Third level</a:t>
             </a:r>
           </a:p>
           <a:p>
             <a:pPr lvl="3"/>
             <a:r>
-              <a:rPr lang="en-US" smtClean="0"/>
+              <a:rPr lang="en-US"/>
               <a:t>Fourth level</a:t>
             </a:r>
           </a:p>
           <a:p>
             <a:pPr lvl="4"/>
             <a:r>
-              <a:rPr lang="en-US" smtClean="0"/>
+              <a:rPr lang="en-US"/>
               <a:t>Fifth level</a:t>
             </a:r>
-            <a:endParaRPr lang="en-US"/>
           </a:p>
         </p:txBody>
       </p:sp>
@@ -468,7 +916,7 @@
           <a:p>
             <a:fld id="{5BCAD085-E8A6-8845-BD4E-CB4CCA059FC4}" type="datetimeFigureOut">
               <a:rPr lang="en-US" smtClean="0"/>
-              <a:t>1/27/13</a:t>
+              <a:t>3/17/2026</a:t>
             </a:fld>
             <a:endParaRPr lang="en-US"/>
           </a:p>
@@ -567,10 +1015,9 @@
           <a:lstStyle/>
           <a:p>
             <a:r>
-              <a:rPr lang="en-US" smtClean="0"/>
+              <a:rPr lang="en-US"/>
               <a:t>Click to edit Master title style</a:t>
             </a:r>
-            <a:endParaRPr lang="en-US"/>
           </a:p>
         </p:txBody>
       </p:sp>
@@ -596,38 +1043,37 @@
           <a:p>
             <a:pPr lvl="0"/>
             <a:r>
-              <a:rPr lang="en-US" smtClean="0"/>
+              <a:rPr lang="en-US"/>
               <a:t>Click to edit Master text styles</a:t>
             </a:r>
           </a:p>
           <a:p>
             <a:pPr lvl="1"/>
             <a:r>
-              <a:rPr lang="en-US" smtClean="0"/>
+              <a:rPr lang="en-US"/>
               <a:t>Second level</a:t>
             </a:r>
           </a:p>
           <a:p>
             <a:pPr lvl="2"/>
             <a:r>
-              <a:rPr lang="en-US" smtClean="0"/>
+              <a:rPr lang="en-US"/>
               <a:t>Third level</a:t>
             </a:r>
           </a:p>
           <a:p>
             <a:pPr lvl="3"/>
             <a:r>
-              <a:rPr lang="en-US" smtClean="0"/>
+              <a:rPr lang="en-US"/>
               <a:t>Fourth level</a:t>
             </a:r>
           </a:p>
           <a:p>
             <a:pPr lvl="4"/>
             <a:r>
-              <a:rPr lang="en-US" smtClean="0"/>
+              <a:rPr lang="en-US"/>
               <a:t>Fifth level</a:t>
             </a:r>
-            <a:endParaRPr lang="en-US"/>
           </a:p>
         </p:txBody>
       </p:sp>
@@ -648,7 +1094,7 @@
           <a:p>
             <a:fld id="{5BCAD085-E8A6-8845-BD4E-CB4CCA059FC4}" type="datetimeFigureOut">
               <a:rPr lang="en-US" smtClean="0"/>
-              <a:t>1/27/13</a:t>
+              <a:t>3/17/2026</a:t>
             </a:fld>
             <a:endParaRPr lang="en-US"/>
           </a:p>
@@ -742,10 +1188,9 @@
           <a:lstStyle/>
           <a:p>
             <a:r>
-              <a:rPr lang="en-US" smtClean="0"/>
+              <a:rPr lang="en-US"/>
               <a:t>Click to edit Master title style</a:t>
             </a:r>
-            <a:endParaRPr lang="en-US"/>
           </a:p>
         </p:txBody>
       </p:sp>
@@ -766,38 +1211,37 @@
           <a:p>
             <a:pPr lvl="0"/>
             <a:r>
-              <a:rPr lang="en-US" smtClean="0"/>
+              <a:rPr lang="en-US"/>
               <a:t>Click to edit Master text styles</a:t>
             </a:r>
           </a:p>
           <a:p>
             <a:pPr lvl="1"/>
             <a:r>
-              <a:rPr lang="en-US" smtClean="0"/>
+              <a:rPr lang="en-US"/>
               <a:t>Second level</a:t>
             </a:r>
           </a:p>
           <a:p>
             <a:pPr lvl="2"/>
             <a:r>
-              <a:rPr lang="en-US" smtClean="0"/>
+              <a:rPr lang="en-US"/>
               <a:t>Third level</a:t>
             </a:r>
           </a:p>
           <a:p>
             <a:pPr lvl="3"/>
             <a:r>
-              <a:rPr lang="en-US" smtClean="0"/>
+              <a:rPr lang="en-US"/>
               <a:t>Fourth level</a:t>
             </a:r>
           </a:p>
           <a:p>
             <a:pPr lvl="4"/>
             <a:r>
-              <a:rPr lang="en-US" smtClean="0"/>
+              <a:rPr lang="en-US"/>
               <a:t>Fifth level</a:t>
             </a:r>
-            <a:endParaRPr lang="en-US"/>
           </a:p>
         </p:txBody>
       </p:sp>
@@ -818,7 +1262,7 @@
           <a:p>
             <a:fld id="{5BCAD085-E8A6-8845-BD4E-CB4CCA059FC4}" type="datetimeFigureOut">
               <a:rPr lang="en-US" smtClean="0"/>
-              <a:t>1/27/13</a:t>
+              <a:t>3/17/2026</a:t>
             </a:fld>
             <a:endParaRPr lang="en-US"/>
           </a:p>
@@ -921,10 +1365,9 @@
           </a:lstStyle>
           <a:p>
             <a:r>
-              <a:rPr lang="en-US" smtClean="0"/>
+              <a:rPr lang="en-US"/>
               <a:t>Click to edit Master title style</a:t>
             </a:r>
-            <a:endParaRPr lang="en-US"/>
           </a:p>
         </p:txBody>
       </p:sp>
@@ -1041,7 +1484,7 @@
           <a:p>
             <a:pPr lvl="0"/>
             <a:r>
-              <a:rPr lang="en-US" smtClean="0"/>
+              <a:rPr lang="en-US"/>
               <a:t>Click to edit Master text styles</a:t>
             </a:r>
           </a:p>
@@ -1064,7 +1507,7 @@
           <a:p>
             <a:fld id="{5BCAD085-E8A6-8845-BD4E-CB4CCA059FC4}" type="datetimeFigureOut">
               <a:rPr lang="en-US" smtClean="0"/>
-              <a:t>1/27/13</a:t>
+              <a:t>3/17/2026</a:t>
             </a:fld>
             <a:endParaRPr lang="en-US"/>
           </a:p>
@@ -1158,10 +1601,9 @@
           <a:lstStyle/>
           <a:p>
             <a:r>
-              <a:rPr lang="en-US" smtClean="0"/>
+              <a:rPr lang="en-US"/>
               <a:t>Click to edit Master title style</a:t>
             </a:r>
-            <a:endParaRPr lang="en-US"/>
           </a:p>
         </p:txBody>
       </p:sp>
@@ -1215,38 +1657,37 @@
           <a:p>
             <a:pPr lvl="0"/>
             <a:r>
-              <a:rPr lang="en-US" smtClean="0"/>
+              <a:rPr lang="en-US"/>
               <a:t>Click to edit Master text styles</a:t>
             </a:r>
           </a:p>
           <a:p>
             <a:pPr lvl="1"/>
             <a:r>
-              <a:rPr lang="en-US" smtClean="0"/>
+              <a:rPr lang="en-US"/>
               <a:t>Second level</a:t>
             </a:r>
           </a:p>
           <a:p>
             <a:pPr lvl="2"/>
             <a:r>
-              <a:rPr lang="en-US" smtClean="0"/>
+              <a:rPr lang="en-US"/>
               <a:t>Third level</a:t>
             </a:r>
           </a:p>
           <a:p>
             <a:pPr lvl="3"/>
             <a:r>
-              <a:rPr lang="en-US" smtClean="0"/>
+              <a:rPr lang="en-US"/>
               <a:t>Fourth level</a:t>
             </a:r>
           </a:p>
           <a:p>
             <a:pPr lvl="4"/>
             <a:r>
-              <a:rPr lang="en-US" smtClean="0"/>
+              <a:rPr lang="en-US"/>
               <a:t>Fifth level</a:t>
             </a:r>
-            <a:endParaRPr lang="en-US"/>
           </a:p>
         </p:txBody>
       </p:sp>
@@ -1300,38 +1741,37 @@
           <a:p>
             <a:pPr lvl="0"/>
             <a:r>
-              <a:rPr lang="en-US" smtClean="0"/>
+              <a:rPr lang="en-US"/>
               <a:t>Click to edit Master text styles</a:t>
             </a:r>
           </a:p>
           <a:p>
             <a:pPr lvl="1"/>
             <a:r>
-              <a:rPr lang="en-US" smtClean="0"/>
+              <a:rPr lang="en-US"/>
               <a:t>Second level</a:t>
             </a:r>
           </a:p>
           <a:p>
             <a:pPr lvl="2"/>
             <a:r>
-              <a:rPr lang="en-US" smtClean="0"/>
+              <a:rPr lang="en-US"/>
               <a:t>Third level</a:t>
             </a:r>
           </a:p>
           <a:p>
             <a:pPr lvl="3"/>
             <a:r>
-              <a:rPr lang="en-US" smtClean="0"/>
+              <a:rPr lang="en-US"/>
               <a:t>Fourth level</a:t>
             </a:r>
           </a:p>
           <a:p>
             <a:pPr lvl="4"/>
             <a:r>
-              <a:rPr lang="en-US" smtClean="0"/>
+              <a:rPr lang="en-US"/>
               <a:t>Fifth level</a:t>
             </a:r>
-            <a:endParaRPr lang="en-US"/>
           </a:p>
         </p:txBody>
       </p:sp>
@@ -1352,7 +1792,7 @@
           <a:p>
             <a:fld id="{5BCAD085-E8A6-8845-BD4E-CB4CCA059FC4}" type="datetimeFigureOut">
               <a:rPr lang="en-US" smtClean="0"/>
-              <a:t>1/27/13</a:t>
+              <a:t>3/17/2026</a:t>
             </a:fld>
             <a:endParaRPr lang="en-US"/>
           </a:p>
@@ -1450,10 +1890,9 @@
           </a:lstStyle>
           <a:p>
             <a:r>
-              <a:rPr lang="en-US" smtClean="0"/>
+              <a:rPr lang="en-US"/>
               <a:t>Click to edit Master title style</a:t>
             </a:r>
-            <a:endParaRPr lang="en-US"/>
           </a:p>
         </p:txBody>
       </p:sp>
@@ -1516,7 +1955,7 @@
           <a:p>
             <a:pPr lvl="0"/>
             <a:r>
-              <a:rPr lang="en-US" smtClean="0"/>
+              <a:rPr lang="en-US"/>
               <a:t>Click to edit Master text styles</a:t>
             </a:r>
           </a:p>
@@ -1572,38 +2011,37 @@
           <a:p>
             <a:pPr lvl="0"/>
             <a:r>
-              <a:rPr lang="en-US" smtClean="0"/>
+              <a:rPr lang="en-US"/>
               <a:t>Click to edit Master text styles</a:t>
             </a:r>
           </a:p>
           <a:p>
             <a:pPr lvl="1"/>
             <a:r>
-              <a:rPr lang="en-US" smtClean="0"/>
+              <a:rPr lang="en-US"/>
               <a:t>Second level</a:t>
             </a:r>
           </a:p>
           <a:p>
             <a:pPr lvl="2"/>
             <a:r>
-              <a:rPr lang="en-US" smtClean="0"/>
+              <a:rPr lang="en-US"/>
               <a:t>Third level</a:t>
             </a:r>
           </a:p>
           <a:p>
             <a:pPr lvl="3"/>
             <a:r>
-              <a:rPr lang="en-US" smtClean="0"/>
+              <a:rPr lang="en-US"/>
               <a:t>Fourth level</a:t>
             </a:r>
           </a:p>
           <a:p>
             <a:pPr lvl="4"/>
             <a:r>
-              <a:rPr lang="en-US" smtClean="0"/>
+              <a:rPr lang="en-US"/>
               <a:t>Fifth level</a:t>
             </a:r>
-            <a:endParaRPr lang="en-US"/>
           </a:p>
         </p:txBody>
       </p:sp>
@@ -1666,7 +2104,7 @@
           <a:p>
             <a:pPr lvl="0"/>
             <a:r>
-              <a:rPr lang="en-US" smtClean="0"/>
+              <a:rPr lang="en-US"/>
               <a:t>Click to edit Master text styles</a:t>
             </a:r>
           </a:p>
@@ -1722,38 +2160,37 @@
           <a:p>
             <a:pPr lvl="0"/>
             <a:r>
-              <a:rPr lang="en-US" smtClean="0"/>
+              <a:rPr lang="en-US"/>
               <a:t>Click to edit Master text styles</a:t>
             </a:r>
           </a:p>
           <a:p>
             <a:pPr lvl="1"/>
             <a:r>
-              <a:rPr lang="en-US" smtClean="0"/>
+              <a:rPr lang="en-US"/>
               <a:t>Second level</a:t>
             </a:r>
           </a:p>
           <a:p>
             <a:pPr lvl="2"/>
             <a:r>
-              <a:rPr lang="en-US" smtClean="0"/>
+              <a:rPr lang="en-US"/>
               <a:t>Third level</a:t>
             </a:r>
           </a:p>
           <a:p>
             <a:pPr lvl="3"/>
             <a:r>
-              <a:rPr lang="en-US" smtClean="0"/>
+              <a:rPr lang="en-US"/>
               <a:t>Fourth level</a:t>
             </a:r>
           </a:p>
           <a:p>
             <a:pPr lvl="4"/>
             <a:r>
-              <a:rPr lang="en-US" smtClean="0"/>
+              <a:rPr lang="en-US"/>
               <a:t>Fifth level</a:t>
             </a:r>
-            <a:endParaRPr lang="en-US"/>
           </a:p>
         </p:txBody>
       </p:sp>
@@ -1774,7 +2211,7 @@
           <a:p>
             <a:fld id="{5BCAD085-E8A6-8845-BD4E-CB4CCA059FC4}" type="datetimeFigureOut">
               <a:rPr lang="en-US" smtClean="0"/>
-              <a:t>1/27/13</a:t>
+              <a:t>3/17/2026</a:t>
             </a:fld>
             <a:endParaRPr lang="en-US"/>
           </a:p>
@@ -1868,10 +2305,9 @@
           <a:lstStyle/>
           <a:p>
             <a:r>
-              <a:rPr lang="en-US" smtClean="0"/>
+              <a:rPr lang="en-US"/>
               <a:t>Click to edit Master title style</a:t>
             </a:r>
-            <a:endParaRPr lang="en-US"/>
           </a:p>
         </p:txBody>
       </p:sp>
@@ -1892,7 +2328,7 @@
           <a:p>
             <a:fld id="{5BCAD085-E8A6-8845-BD4E-CB4CCA059FC4}" type="datetimeFigureOut">
               <a:rPr lang="en-US" smtClean="0"/>
-              <a:t>1/27/13</a:t>
+              <a:t>3/17/2026</a:t>
             </a:fld>
             <a:endParaRPr lang="en-US"/>
           </a:p>
@@ -1987,7 +2423,7 @@
           <a:p>
             <a:fld id="{5BCAD085-E8A6-8845-BD4E-CB4CCA059FC4}" type="datetimeFigureOut">
               <a:rPr lang="en-US" smtClean="0"/>
-              <a:t>1/27/13</a:t>
+              <a:t>3/17/2026</a:t>
             </a:fld>
             <a:endParaRPr lang="en-US"/>
           </a:p>
@@ -2090,10 +2526,9 @@
           </a:lstStyle>
           <a:p>
             <a:r>
-              <a:rPr lang="en-US" smtClean="0"/>
+              <a:rPr lang="en-US"/>
               <a:t>Click to edit Master title style</a:t>
             </a:r>
-            <a:endParaRPr lang="en-US"/>
           </a:p>
         </p:txBody>
       </p:sp>
@@ -2147,38 +2582,37 @@
           <a:p>
             <a:pPr lvl="0"/>
             <a:r>
-              <a:rPr lang="en-US" smtClean="0"/>
+              <a:rPr lang="en-US"/>
               <a:t>Click to edit Master text styles</a:t>
             </a:r>
           </a:p>
           <a:p>
             <a:pPr lvl="1"/>
             <a:r>
-              <a:rPr lang="en-US" smtClean="0"/>
+              <a:rPr lang="en-US"/>
               <a:t>Second level</a:t>
             </a:r>
           </a:p>
           <a:p>
             <a:pPr lvl="2"/>
             <a:r>
-              <a:rPr lang="en-US" smtClean="0"/>
+              <a:rPr lang="en-US"/>
               <a:t>Third level</a:t>
             </a:r>
           </a:p>
           <a:p>
             <a:pPr lvl="3"/>
             <a:r>
-              <a:rPr lang="en-US" smtClean="0"/>
+              <a:rPr lang="en-US"/>
               <a:t>Fourth level</a:t>
             </a:r>
           </a:p>
           <a:p>
             <a:pPr lvl="4"/>
             <a:r>
-              <a:rPr lang="en-US" smtClean="0"/>
+              <a:rPr lang="en-US"/>
               <a:t>Fifth level</a:t>
             </a:r>
-            <a:endParaRPr lang="en-US"/>
           </a:p>
         </p:txBody>
       </p:sp>
@@ -2241,7 +2675,7 @@
           <a:p>
             <a:pPr lvl="0"/>
             <a:r>
-              <a:rPr lang="en-US" smtClean="0"/>
+              <a:rPr lang="en-US"/>
               <a:t>Click to edit Master text styles</a:t>
             </a:r>
           </a:p>
@@ -2264,7 +2698,7 @@
           <a:p>
             <a:fld id="{5BCAD085-E8A6-8845-BD4E-CB4CCA059FC4}" type="datetimeFigureOut">
               <a:rPr lang="en-US" smtClean="0"/>
-              <a:t>1/27/13</a:t>
+              <a:t>3/17/2026</a:t>
             </a:fld>
             <a:endParaRPr lang="en-US"/>
           </a:p>
@@ -2367,10 +2801,9 @@
           </a:lstStyle>
           <a:p>
             <a:r>
-              <a:rPr lang="en-US" smtClean="0"/>
+              <a:rPr lang="en-US"/>
               <a:t>Click to edit Master title style</a:t>
             </a:r>
-            <a:endParaRPr lang="en-US"/>
           </a:p>
         </p:txBody>
       </p:sp>
@@ -2494,7 +2927,7 @@
           <a:p>
             <a:pPr lvl="0"/>
             <a:r>
-              <a:rPr lang="en-US" smtClean="0"/>
+              <a:rPr lang="en-US"/>
               <a:t>Click to edit Master text styles</a:t>
             </a:r>
           </a:p>
@@ -2517,7 +2950,7 @@
           <a:p>
             <a:fld id="{5BCAD085-E8A6-8845-BD4E-CB4CCA059FC4}" type="datetimeFigureOut">
               <a:rPr lang="en-US" smtClean="0"/>
-              <a:t>1/27/13</a:t>
+              <a:t>3/17/2026</a:t>
             </a:fld>
             <a:endParaRPr lang="en-US"/>
           </a:p>
@@ -2626,10 +3059,9 @@
           <a:lstStyle/>
           <a:p>
             <a:r>
-              <a:rPr lang="en-US" smtClean="0"/>
+              <a:rPr lang="en-US"/>
               <a:t>Click to edit Master title style</a:t>
             </a:r>
-            <a:endParaRPr lang="en-US"/>
           </a:p>
         </p:txBody>
       </p:sp>
@@ -2660,38 +3092,37 @@
           <a:p>
             <a:pPr lvl="0"/>
             <a:r>
-              <a:rPr lang="en-US" smtClean="0"/>
+              <a:rPr lang="en-US"/>
               <a:t>Click to edit Master text styles</a:t>
             </a:r>
           </a:p>
           <a:p>
             <a:pPr lvl="1"/>
             <a:r>
-              <a:rPr lang="en-US" smtClean="0"/>
+              <a:rPr lang="en-US"/>
               <a:t>Second level</a:t>
             </a:r>
           </a:p>
           <a:p>
             <a:pPr lvl="2"/>
             <a:r>
-              <a:rPr lang="en-US" smtClean="0"/>
+              <a:rPr lang="en-US"/>
               <a:t>Third level</a:t>
             </a:r>
           </a:p>
           <a:p>
             <a:pPr lvl="3"/>
             <a:r>
-              <a:rPr lang="en-US" smtClean="0"/>
+              <a:rPr lang="en-US"/>
               <a:t>Fourth level</a:t>
             </a:r>
           </a:p>
           <a:p>
             <a:pPr lvl="4"/>
             <a:r>
-              <a:rPr lang="en-US" smtClean="0"/>
+              <a:rPr lang="en-US"/>
               <a:t>Fifth level</a:t>
             </a:r>
-            <a:endParaRPr lang="en-US"/>
           </a:p>
         </p:txBody>
       </p:sp>
@@ -2730,7 +3161,7 @@
           <a:p>
             <a:fld id="{5BCAD085-E8A6-8845-BD4E-CB4CCA059FC4}" type="datetimeFigureOut">
               <a:rPr lang="en-US" smtClean="0"/>
-              <a:t>1/27/13</a:t>
+              <a:t>3/17/2026</a:t>
             </a:fld>
             <a:endParaRPr lang="en-US"/>
           </a:p>
@@ -3089,7 +3520,7 @@
 </file>
 
 <file path=ppt/slides/slide1.xml><?xml version="1.0" encoding="utf-8"?>
-<p:sld xmlns:a="http://schemas.openxmlformats.org/drawingml/2006/main" xmlns:p="http://schemas.openxmlformats.org/presentationml/2006/main" xmlns:r="http://schemas.openxmlformats.org/officeDocument/2006/relationships">
+<p:sld xmlns:a="http://schemas.openxmlformats.org/drawingml/2006/main" xmlns:r="http://schemas.openxmlformats.org/officeDocument/2006/relationships" xmlns:p="http://schemas.openxmlformats.org/presentationml/2006/main">
   <p:cSld>
     <p:spTree>
       <p:nvGrpSpPr>
@@ -3097,7 +3528,14 @@
         <p:cNvGrpSpPr/>
         <p:nvPr/>
       </p:nvGrpSpPr>
-      <p:grpSpPr/>
+      <p:grpSpPr>
+        <a:xfrm>
+          <a:off x="0" y="0"/>
+          <a:ext cx="0" cy="0"/>
+          <a:chOff x="0" y="0"/>
+          <a:chExt cx="0" cy="0"/>
+        </a:xfrm>
+      </p:grpSpPr>
       <p:sp>
         <p:nvSpPr>
           <p:cNvPr id="2" name="Rectangle 1"/>
@@ -3138,6 +3576,7 @@
           <a:lstStyle/>
           <a:p>
             <a:pPr algn="ctr"/>
+            <a:endParaRPr/>
           </a:p>
         </p:txBody>
       </p:sp>
@@ -3220,7 +3659,7 @@
 </file>
 
 <file path=ppt/slides/slide10.xml><?xml version="1.0" encoding="utf-8"?>
-<p:sld xmlns:a="http://schemas.openxmlformats.org/drawingml/2006/main" xmlns:p="http://schemas.openxmlformats.org/presentationml/2006/main" xmlns:r="http://schemas.openxmlformats.org/officeDocument/2006/relationships">
+<p:sld xmlns:a="http://schemas.openxmlformats.org/drawingml/2006/main" xmlns:r="http://schemas.openxmlformats.org/officeDocument/2006/relationships" xmlns:p="http://schemas.openxmlformats.org/presentationml/2006/main">
   <p:cSld>
     <p:spTree>
       <p:nvGrpSpPr>
@@ -3228,7 +3667,14 @@
         <p:cNvGrpSpPr/>
         <p:nvPr/>
       </p:nvGrpSpPr>
-      <p:grpSpPr/>
+      <p:grpSpPr>
+        <a:xfrm>
+          <a:off x="0" y="0"/>
+          <a:ext cx="0" cy="0"/>
+          <a:chOff x="0" y="0"/>
+          <a:chExt cx="0" cy="0"/>
+        </a:xfrm>
+      </p:grpSpPr>
       <p:sp>
         <p:nvSpPr>
           <p:cNvPr id="2" name="Rectangle 1"/>
@@ -3269,6 +3715,7 @@
           <a:lstStyle/>
           <a:p>
             <a:pPr algn="ctr"/>
+            <a:endParaRPr/>
           </a:p>
         </p:txBody>
       </p:sp>
@@ -3349,6 +3796,7 @@
           <a:lstStyle/>
           <a:p>
             <a:pPr algn="ctr"/>
+            <a:endParaRPr/>
           </a:p>
         </p:txBody>
       </p:sp>
@@ -3405,6 +3853,7 @@
                 </a:solidFill>
               </a:defRPr>
             </a:pPr>
+            <a:endParaRPr/>
           </a:p>
           <a:p>
             <a:pPr>
@@ -3462,6 +3911,7 @@
                 </a:solidFill>
               </a:defRPr>
             </a:pPr>
+            <a:endParaRPr/>
           </a:p>
           <a:p>
             <a:pPr>
@@ -3531,6 +3981,7 @@
           <a:lstStyle/>
           <a:p>
             <a:pPr algn="ctr"/>
+            <a:endParaRPr/>
           </a:p>
         </p:txBody>
       </p:sp>
@@ -3578,7 +4029,7 @@
 </file>
 
 <file path=ppt/slides/slide11.xml><?xml version="1.0" encoding="utf-8"?>
-<p:sld xmlns:a="http://schemas.openxmlformats.org/drawingml/2006/main" xmlns:p="http://schemas.openxmlformats.org/presentationml/2006/main" xmlns:r="http://schemas.openxmlformats.org/officeDocument/2006/relationships">
+<p:sld xmlns:a="http://schemas.openxmlformats.org/drawingml/2006/main" xmlns:r="http://schemas.openxmlformats.org/officeDocument/2006/relationships" xmlns:p="http://schemas.openxmlformats.org/presentationml/2006/main">
   <p:cSld>
     <p:spTree>
       <p:nvGrpSpPr>
@@ -3586,7 +4037,14 @@
         <p:cNvGrpSpPr/>
         <p:nvPr/>
       </p:nvGrpSpPr>
-      <p:grpSpPr/>
+      <p:grpSpPr>
+        <a:xfrm>
+          <a:off x="0" y="0"/>
+          <a:ext cx="0" cy="0"/>
+          <a:chOff x="0" y="0"/>
+          <a:chExt cx="0" cy="0"/>
+        </a:xfrm>
+      </p:grpSpPr>
       <p:sp>
         <p:nvSpPr>
           <p:cNvPr id="2" name="Rectangle 1"/>
@@ -3627,6 +4085,7 @@
           <a:lstStyle/>
           <a:p>
             <a:pPr algn="ctr"/>
+            <a:endParaRPr/>
           </a:p>
         </p:txBody>
       </p:sp>
@@ -3779,7 +4238,7 @@
 </file>
 
 <file path=ppt/slides/slide2.xml><?xml version="1.0" encoding="utf-8"?>
-<p:sld xmlns:a="http://schemas.openxmlformats.org/drawingml/2006/main" xmlns:p="http://schemas.openxmlformats.org/presentationml/2006/main" xmlns:r="http://schemas.openxmlformats.org/officeDocument/2006/relationships">
+<p:sld xmlns:a="http://schemas.openxmlformats.org/drawingml/2006/main" xmlns:r="http://schemas.openxmlformats.org/officeDocument/2006/relationships" xmlns:p="http://schemas.openxmlformats.org/presentationml/2006/main">
   <p:cSld>
     <p:spTree>
       <p:nvGrpSpPr>
@@ -3787,7 +4246,14 @@
         <p:cNvGrpSpPr/>
         <p:nvPr/>
       </p:nvGrpSpPr>
-      <p:grpSpPr/>
+      <p:grpSpPr>
+        <a:xfrm>
+          <a:off x="0" y="0"/>
+          <a:ext cx="0" cy="0"/>
+          <a:chOff x="0" y="0"/>
+          <a:chExt cx="0" cy="0"/>
+        </a:xfrm>
+      </p:grpSpPr>
       <p:sp>
         <p:nvSpPr>
           <p:cNvPr id="2" name="Rectangle 1"/>
@@ -3828,6 +4294,7 @@
           <a:lstStyle/>
           <a:p>
             <a:pPr algn="ctr"/>
+            <a:endParaRPr/>
           </a:p>
         </p:txBody>
       </p:sp>
@@ -3840,7 +4307,7 @@
         <p:spPr>
           <a:xfrm>
             <a:off x="457200" y="274320"/>
-            <a:ext cx="11277295" cy="731520"/>
+            <a:ext cx="5423280" cy="646331"/>
           </a:xfrm>
           <a:prstGeom prst="rect">
             <a:avLst/>
@@ -3861,8 +4328,21 @@
               </a:defRPr>
             </a:pPr>
             <a:r>
-              <a:t>研发痛点问题</a:t>
-            </a:r>
+              <a:rPr dirty="0" err="1"/>
+              <a:t>研发</a:t>
+            </a:r>
+            <a:r>
+              <a:rPr lang="en-US" dirty="0"/>
+              <a:t> &amp; </a:t>
+            </a:r>
+            <a:r>
+              <a:rPr lang="en-US"/>
+              <a:t>AI Coding </a:t>
+            </a:r>
+            <a:r>
+              <a:t>痛点问题</a:t>
+            </a:r>
+            <a:endParaRPr dirty="0"/>
           </a:p>
         </p:txBody>
       </p:sp>
@@ -3908,6 +4388,7 @@
           <a:lstStyle/>
           <a:p>
             <a:pPr algn="ctr"/>
+            <a:endParaRPr/>
           </a:p>
         </p:txBody>
       </p:sp>
@@ -3976,8 +4457,14 @@
               </a:defRPr>
             </a:pPr>
             <a:r>
-              <a:t>• 每次对话需要重新解释项目结构</a:t>
-            </a:r>
+              <a:rPr dirty="0"/>
+              <a:t>• </a:t>
+            </a:r>
+            <a:r>
+              <a:rPr dirty="0" err="1"/>
+              <a:t>每次对话需要重新解释项目结构</a:t>
+            </a:r>
+            <a:endParaRPr dirty="0"/>
           </a:p>
           <a:p>
             <a:pPr>
@@ -3988,8 +4475,14 @@
               </a:defRPr>
             </a:pPr>
             <a:r>
-              <a:t>• AI 缺乏项目知识积累机制</a:t>
-            </a:r>
+              <a:rPr dirty="0"/>
+              <a:t>• AI </a:t>
+            </a:r>
+            <a:r>
+              <a:rPr dirty="0" err="1"/>
+              <a:t>缺乏项目知识积累机制</a:t>
+            </a:r>
+            <a:endParaRPr dirty="0"/>
           </a:p>
           <a:p>
             <a:pPr>
@@ -4000,8 +4493,14 @@
               </a:defRPr>
             </a:pPr>
             <a:r>
-              <a:t>• 重复性沟通消耗大量时间</a:t>
-            </a:r>
+              <a:rPr dirty="0"/>
+              <a:t>• </a:t>
+            </a:r>
+            <a:r>
+              <a:rPr dirty="0" err="1"/>
+              <a:t>重复性沟通消耗大量时间</a:t>
+            </a:r>
+            <a:endParaRPr dirty="0"/>
           </a:p>
         </p:txBody>
       </p:sp>
@@ -4047,6 +4546,7 @@
           <a:lstStyle/>
           <a:p>
             <a:pPr algn="ctr"/>
+            <a:endParaRPr/>
           </a:p>
         </p:txBody>
       </p:sp>
@@ -4115,8 +4615,38 @@
               </a:defRPr>
             </a:pPr>
             <a:r>
-              <a:t>• 构建/测试/部署 需要切换多个环境</a:t>
-            </a:r>
+              <a:rPr dirty="0"/>
+              <a:t>• </a:t>
+            </a:r>
+            <a:r>
+              <a:rPr dirty="0" err="1"/>
+              <a:t>构建</a:t>
+            </a:r>
+            <a:r>
+              <a:rPr dirty="0"/>
+              <a:t>/</a:t>
+            </a:r>
+            <a:r>
+              <a:rPr dirty="0" err="1"/>
+              <a:t>测试</a:t>
+            </a:r>
+            <a:r>
+              <a:rPr dirty="0"/>
+              <a:t>/</a:t>
+            </a:r>
+            <a:r>
+              <a:rPr dirty="0" err="1"/>
+              <a:t>部署</a:t>
+            </a:r>
+            <a:r>
+              <a:rPr dirty="0"/>
+              <a:t> </a:t>
+            </a:r>
+            <a:r>
+              <a:rPr dirty="0" err="1"/>
+              <a:t>需要切换多个环境</a:t>
+            </a:r>
+            <a:endParaRPr dirty="0"/>
           </a:p>
           <a:p>
             <a:pPr>
@@ -4127,8 +4657,14 @@
               </a:defRPr>
             </a:pPr>
             <a:r>
-              <a:t>• 错误修复缺乏系统性方法</a:t>
-            </a:r>
+              <a:rPr dirty="0"/>
+              <a:t>• </a:t>
+            </a:r>
+            <a:r>
+              <a:rPr dirty="0" err="1"/>
+              <a:t>错误修复缺乏系统性方法</a:t>
+            </a:r>
+            <a:endParaRPr dirty="0"/>
           </a:p>
           <a:p>
             <a:pPr>
@@ -4139,8 +4675,22 @@
               </a:defRPr>
             </a:pPr>
             <a:r>
-              <a:t>• 跨平台开发（Windows编辑 + Linux运行）复杂</a:t>
-            </a:r>
+              <a:rPr dirty="0"/>
+              <a:t>• </a:t>
+            </a:r>
+            <a:r>
+              <a:rPr dirty="0" err="1"/>
+              <a:t>跨平台开发（Windows编辑</a:t>
+            </a:r>
+            <a:r>
+              <a:rPr dirty="0"/>
+              <a:t> + </a:t>
+            </a:r>
+            <a:r>
+              <a:rPr dirty="0" err="1"/>
+              <a:t>Linux运行）复杂</a:t>
+            </a:r>
+            <a:endParaRPr dirty="0"/>
           </a:p>
         </p:txBody>
       </p:sp>
@@ -4186,6 +4736,7 @@
           <a:lstStyle/>
           <a:p>
             <a:pPr algn="ctr"/>
+            <a:endParaRPr/>
           </a:p>
         </p:txBody>
       </p:sp>
@@ -4292,7 +4843,7 @@
 </file>
 
 <file path=ppt/slides/slide3.xml><?xml version="1.0" encoding="utf-8"?>
-<p:sld xmlns:a="http://schemas.openxmlformats.org/drawingml/2006/main" xmlns:p="http://schemas.openxmlformats.org/presentationml/2006/main" xmlns:r="http://schemas.openxmlformats.org/officeDocument/2006/relationships">
+<p:sld xmlns:a="http://schemas.openxmlformats.org/drawingml/2006/main" xmlns:r="http://schemas.openxmlformats.org/officeDocument/2006/relationships" xmlns:p="http://schemas.openxmlformats.org/presentationml/2006/main">
   <p:cSld>
     <p:spTree>
       <p:nvGrpSpPr>
@@ -4300,7 +4851,14 @@
         <p:cNvGrpSpPr/>
         <p:nvPr/>
       </p:nvGrpSpPr>
-      <p:grpSpPr/>
+      <p:grpSpPr>
+        <a:xfrm>
+          <a:off x="0" y="0"/>
+          <a:ext cx="0" cy="0"/>
+          <a:chOff x="0" y="0"/>
+          <a:chExt cx="0" cy="0"/>
+        </a:xfrm>
+      </p:grpSpPr>
       <p:sp>
         <p:nvSpPr>
           <p:cNvPr id="2" name="Rectangle 1"/>
@@ -4341,6 +4899,7 @@
           <a:lstStyle/>
           <a:p>
             <a:pPr algn="ctr"/>
+            <a:endParaRPr/>
           </a:p>
         </p:txBody>
       </p:sp>
@@ -4352,8 +4911,8 @@
         </p:nvSpPr>
         <p:spPr>
           <a:xfrm>
-            <a:off x="457200" y="274320"/>
-            <a:ext cx="11277295" cy="731520"/>
+            <a:off x="368390" y="216991"/>
+            <a:ext cx="10040992" cy="646331"/>
           </a:xfrm>
           <a:prstGeom prst="rect">
             <a:avLst/>
@@ -4361,7 +4920,7 @@
           <a:noFill/>
         </p:spPr>
         <p:txBody>
-          <a:bodyPr wrap="none">
+          <a:bodyPr wrap="square">
             <a:spAutoFit/>
           </a:bodyPr>
           <a:lstStyle/>
@@ -4374,42 +4933,12 @@
               </a:defRPr>
             </a:pPr>
             <a:r>
-              <a:t>Google Agent 白皮书核心理念</a:t>
-            </a:r>
-          </a:p>
-        </p:txBody>
-      </p:sp>
-      <p:sp>
-        <p:nvSpPr>
-          <p:cNvPr id="4" name="TextBox 3"/>
-          <p:cNvSpPr txBox="1"/>
-          <p:nvPr/>
-        </p:nvSpPr>
-        <p:spPr>
-          <a:xfrm>
-            <a:off x="457200" y="1005840"/>
-            <a:ext cx="11277295" cy="457200"/>
-          </a:xfrm>
-          <a:prstGeom prst="rect">
-            <a:avLst/>
-          </a:prstGeom>
-          <a:noFill/>
-        </p:spPr>
-        <p:txBody>
-          <a:bodyPr wrap="none">
-            <a:spAutoFit/>
-          </a:bodyPr>
-          <a:lstStyle/>
-          <a:p>
-            <a:pPr algn="ctr">
-              <a:defRPr sz="2400">
-                <a:solidFill>
-                  <a:srgbClr val="FFCC00"/>
-                </a:solidFill>
-              </a:defRPr>
-            </a:pPr>
-            <a:r>
+              <a:rPr lang="en-US" altLang="zh-CN" dirty="0"/>
               <a:t>Agent = Model + Tools + Orchestration</a:t>
+            </a:r>
+            <a:r>
+              <a:rPr lang="zh-CN" altLang="en-US" dirty="0"/>
+              <a:t>理念</a:t>
             </a:r>
           </a:p>
         </p:txBody>
@@ -4848,7 +5377,7 @@
 </file>
 
 <file path=ppt/slides/slide4.xml><?xml version="1.0" encoding="utf-8"?>
-<p:sld xmlns:a="http://schemas.openxmlformats.org/drawingml/2006/main" xmlns:p="http://schemas.openxmlformats.org/presentationml/2006/main" xmlns:r="http://schemas.openxmlformats.org/officeDocument/2006/relationships">
+<p:sld xmlns:a="http://schemas.openxmlformats.org/drawingml/2006/main" xmlns:r="http://schemas.openxmlformats.org/officeDocument/2006/relationships" xmlns:p="http://schemas.openxmlformats.org/presentationml/2006/main">
   <p:cSld>
     <p:spTree>
       <p:nvGrpSpPr>
@@ -4856,7 +5385,14 @@
         <p:cNvGrpSpPr/>
         <p:nvPr/>
       </p:nvGrpSpPr>
-      <p:grpSpPr/>
+      <p:grpSpPr>
+        <a:xfrm>
+          <a:off x="0" y="0"/>
+          <a:ext cx="0" cy="0"/>
+          <a:chOff x="0" y="0"/>
+          <a:chExt cx="0" cy="0"/>
+        </a:xfrm>
+      </p:grpSpPr>
       <p:sp>
         <p:nvSpPr>
           <p:cNvPr id="2" name="Rectangle 1"/>
@@ -4897,6 +5433,7 @@
           <a:lstStyle/>
           <a:p>
             <a:pPr algn="ctr"/>
+            <a:endParaRPr/>
           </a:p>
         </p:txBody>
       </p:sp>
@@ -4977,6 +5514,7 @@
           <a:lstStyle/>
           <a:p>
             <a:pPr algn="ctr"/>
+            <a:endParaRPr/>
           </a:p>
         </p:txBody>
       </p:sp>
@@ -5477,6 +6015,7 @@
           <a:lstStyle/>
           <a:p>
             <a:pPr algn="ctr"/>
+            <a:endParaRPr/>
           </a:p>
         </p:txBody>
       </p:sp>
@@ -5627,6 +6166,7 @@
           <a:lstStyle/>
           <a:p>
             <a:pPr algn="ctr"/>
+            <a:endParaRPr/>
           </a:p>
         </p:txBody>
       </p:sp>
@@ -5777,6 +6317,7 @@
           <a:lstStyle/>
           <a:p>
             <a:pPr algn="ctr"/>
+            <a:endParaRPr/>
           </a:p>
         </p:txBody>
       </p:sp>
@@ -5927,6 +6468,7 @@
           <a:lstStyle/>
           <a:p>
             <a:pPr algn="ctr"/>
+            <a:endParaRPr/>
           </a:p>
         </p:txBody>
       </p:sp>
@@ -6044,7 +6586,7 @@
 </file>
 
 <file path=ppt/slides/slide5.xml><?xml version="1.0" encoding="utf-8"?>
-<p:sld xmlns:a="http://schemas.openxmlformats.org/drawingml/2006/main" xmlns:p="http://schemas.openxmlformats.org/presentationml/2006/main" xmlns:r="http://schemas.openxmlformats.org/officeDocument/2006/relationships">
+<p:sld xmlns:a="http://schemas.openxmlformats.org/drawingml/2006/main" xmlns:r="http://schemas.openxmlformats.org/officeDocument/2006/relationships" xmlns:p="http://schemas.openxmlformats.org/presentationml/2006/main">
   <p:cSld>
     <p:spTree>
       <p:nvGrpSpPr>
@@ -6052,7 +6594,14 @@
         <p:cNvGrpSpPr/>
         <p:nvPr/>
       </p:nvGrpSpPr>
-      <p:grpSpPr/>
+      <p:grpSpPr>
+        <a:xfrm>
+          <a:off x="0" y="0"/>
+          <a:ext cx="0" cy="0"/>
+          <a:chOff x="0" y="0"/>
+          <a:chExt cx="0" cy="0"/>
+        </a:xfrm>
+      </p:grpSpPr>
       <p:sp>
         <p:nvSpPr>
           <p:cNvPr id="2" name="Rectangle 1"/>
@@ -6093,6 +6642,7 @@
           <a:lstStyle/>
           <a:p>
             <a:pPr algn="ctr"/>
+            <a:endParaRPr/>
           </a:p>
         </p:txBody>
       </p:sp>
@@ -6208,6 +6758,7 @@
           <a:lstStyle/>
           <a:p>
             <a:pPr algn="ctr"/>
+            <a:endParaRPr/>
           </a:p>
         </p:txBody>
       </p:sp>
@@ -6323,6 +6874,7 @@
                 </a:solidFill>
               </a:defRPr>
             </a:pPr>
+            <a:endParaRPr/>
           </a:p>
           <a:p>
             <a:pPr>
@@ -6380,6 +6932,7 @@
           <a:lstStyle/>
           <a:p>
             <a:pPr algn="ctr"/>
+            <a:endParaRPr/>
           </a:p>
         </p:txBody>
       </p:sp>
@@ -6483,6 +7036,7 @@
                 </a:solidFill>
               </a:defRPr>
             </a:pPr>
+            <a:endParaRPr/>
           </a:p>
           <a:p>
             <a:pPr>
@@ -6540,6 +7094,7 @@
           <a:lstStyle/>
           <a:p>
             <a:pPr algn="ctr"/>
+            <a:endParaRPr/>
           </a:p>
         </p:txBody>
       </p:sp>
@@ -6587,7 +7142,7 @@
 </file>
 
 <file path=ppt/slides/slide6.xml><?xml version="1.0" encoding="utf-8"?>
-<p:sld xmlns:a="http://schemas.openxmlformats.org/drawingml/2006/main" xmlns:p="http://schemas.openxmlformats.org/presentationml/2006/main" xmlns:r="http://schemas.openxmlformats.org/officeDocument/2006/relationships">
+<p:sld xmlns:a="http://schemas.openxmlformats.org/drawingml/2006/main" xmlns:r="http://schemas.openxmlformats.org/officeDocument/2006/relationships" xmlns:p="http://schemas.openxmlformats.org/presentationml/2006/main">
   <p:cSld>
     <p:spTree>
       <p:nvGrpSpPr>
@@ -6595,7 +7150,14 @@
         <p:cNvGrpSpPr/>
         <p:nvPr/>
       </p:nvGrpSpPr>
-      <p:grpSpPr/>
+      <p:grpSpPr>
+        <a:xfrm>
+          <a:off x="0" y="0"/>
+          <a:ext cx="0" cy="0"/>
+          <a:chOff x="0" y="0"/>
+          <a:chExt cx="0" cy="0"/>
+        </a:xfrm>
+      </p:grpSpPr>
       <p:sp>
         <p:nvSpPr>
           <p:cNvPr id="2" name="Rectangle 1"/>
@@ -6636,6 +7198,7 @@
           <a:lstStyle/>
           <a:p>
             <a:pPr algn="ctr"/>
+            <a:endParaRPr/>
           </a:p>
         </p:txBody>
       </p:sp>
@@ -6716,6 +7279,7 @@
           <a:lstStyle/>
           <a:p>
             <a:pPr algn="ctr"/>
+            <a:endParaRPr/>
           </a:p>
         </p:txBody>
       </p:sp>
@@ -6866,6 +7430,7 @@
           <a:lstStyle/>
           <a:p>
             <a:pPr algn="ctr"/>
+            <a:endParaRPr/>
           </a:p>
         </p:txBody>
       </p:sp>
@@ -7024,6 +7589,7 @@
           <a:lstStyle/>
           <a:p>
             <a:pPr algn="ctr"/>
+            <a:endParaRPr/>
           </a:p>
         </p:txBody>
       </p:sp>
@@ -7252,6 +7818,7 @@
           <a:lstStyle/>
           <a:p>
             <a:pPr algn="ctr"/>
+            <a:endParaRPr/>
           </a:p>
         </p:txBody>
       </p:sp>
@@ -7358,7 +7925,7 @@
 </file>
 
 <file path=ppt/slides/slide7.xml><?xml version="1.0" encoding="utf-8"?>
-<p:sld xmlns:a="http://schemas.openxmlformats.org/drawingml/2006/main" xmlns:p="http://schemas.openxmlformats.org/presentationml/2006/main" xmlns:r="http://schemas.openxmlformats.org/officeDocument/2006/relationships">
+<p:sld xmlns:a="http://schemas.openxmlformats.org/drawingml/2006/main" xmlns:r="http://schemas.openxmlformats.org/officeDocument/2006/relationships" xmlns:p="http://schemas.openxmlformats.org/presentationml/2006/main">
   <p:cSld>
     <p:spTree>
       <p:nvGrpSpPr>
@@ -7366,7 +7933,14 @@
         <p:cNvGrpSpPr/>
         <p:nvPr/>
       </p:nvGrpSpPr>
-      <p:grpSpPr/>
+      <p:grpSpPr>
+        <a:xfrm>
+          <a:off x="0" y="0"/>
+          <a:ext cx="0" cy="0"/>
+          <a:chOff x="0" y="0"/>
+          <a:chExt cx="0" cy="0"/>
+        </a:xfrm>
+      </p:grpSpPr>
       <p:sp>
         <p:nvSpPr>
           <p:cNvPr id="2" name="Rectangle 1"/>
@@ -7407,6 +7981,7 @@
           <a:lstStyle/>
           <a:p>
             <a:pPr algn="ctr"/>
+            <a:endParaRPr/>
           </a:p>
         </p:txBody>
       </p:sp>
@@ -7522,6 +8097,7 @@
           <a:lstStyle/>
           <a:p>
             <a:pPr algn="ctr"/>
+            <a:endParaRPr/>
           </a:p>
         </p:txBody>
       </p:sp>
@@ -7672,6 +8248,7 @@
           <a:lstStyle/>
           <a:p>
             <a:pPr algn="ctr"/>
+            <a:endParaRPr/>
           </a:p>
         </p:txBody>
       </p:sp>
@@ -7822,6 +8399,7 @@
           <a:lstStyle/>
           <a:p>
             <a:pPr algn="ctr"/>
+            <a:endParaRPr/>
           </a:p>
         </p:txBody>
       </p:sp>
@@ -7972,6 +8550,7 @@
           <a:lstStyle/>
           <a:p>
             <a:pPr algn="ctr"/>
+            <a:endParaRPr/>
           </a:p>
         </p:txBody>
       </p:sp>
@@ -8122,6 +8701,7 @@
           <a:lstStyle/>
           <a:p>
             <a:pPr algn="ctr"/>
+            <a:endParaRPr/>
           </a:p>
         </p:txBody>
       </p:sp>
@@ -8239,7 +8819,7 @@
 </file>
 
 <file path=ppt/slides/slide8.xml><?xml version="1.0" encoding="utf-8"?>
-<p:sld xmlns:a="http://schemas.openxmlformats.org/drawingml/2006/main" xmlns:p="http://schemas.openxmlformats.org/presentationml/2006/main" xmlns:r="http://schemas.openxmlformats.org/officeDocument/2006/relationships">
+<p:sld xmlns:a="http://schemas.openxmlformats.org/drawingml/2006/main" xmlns:r="http://schemas.openxmlformats.org/officeDocument/2006/relationships" xmlns:p="http://schemas.openxmlformats.org/presentationml/2006/main">
   <p:cSld>
     <p:spTree>
       <p:nvGrpSpPr>
@@ -8247,7 +8827,14 @@
         <p:cNvGrpSpPr/>
         <p:nvPr/>
       </p:nvGrpSpPr>
-      <p:grpSpPr/>
+      <p:grpSpPr>
+        <a:xfrm>
+          <a:off x="0" y="0"/>
+          <a:ext cx="0" cy="0"/>
+          <a:chOff x="0" y="0"/>
+          <a:chExt cx="0" cy="0"/>
+        </a:xfrm>
+      </p:grpSpPr>
       <p:sp>
         <p:nvSpPr>
           <p:cNvPr id="2" name="Rectangle 1"/>
@@ -8288,6 +8875,7 @@
           <a:lstStyle/>
           <a:p>
             <a:pPr algn="ctr"/>
+            <a:endParaRPr/>
           </a:p>
         </p:txBody>
       </p:sp>
@@ -8403,6 +8991,7 @@
           <a:lstStyle/>
           <a:p>
             <a:pPr algn="ctr"/>
+            <a:endParaRPr/>
           </a:p>
         </p:txBody>
       </p:sp>
@@ -8542,6 +9131,7 @@
           <a:lstStyle/>
           <a:p>
             <a:pPr algn="ctr"/>
+            <a:endParaRPr/>
           </a:p>
         </p:txBody>
       </p:sp>
@@ -8681,6 +9271,7 @@
           <a:lstStyle/>
           <a:p>
             <a:pPr algn="ctr"/>
+            <a:endParaRPr/>
           </a:p>
         </p:txBody>
       </p:sp>
@@ -8800,7 +9391,7 @@
 </file>
 
 <file path=ppt/slides/slide9.xml><?xml version="1.0" encoding="utf-8"?>
-<p:sld xmlns:a="http://schemas.openxmlformats.org/drawingml/2006/main" xmlns:p="http://schemas.openxmlformats.org/presentationml/2006/main" xmlns:r="http://schemas.openxmlformats.org/officeDocument/2006/relationships">
+<p:sld xmlns:a="http://schemas.openxmlformats.org/drawingml/2006/main" xmlns:r="http://schemas.openxmlformats.org/officeDocument/2006/relationships" xmlns:p="http://schemas.openxmlformats.org/presentationml/2006/main">
   <p:cSld>
     <p:spTree>
       <p:nvGrpSpPr>
@@ -8808,7 +9399,14 @@
         <p:cNvGrpSpPr/>
         <p:nvPr/>
       </p:nvGrpSpPr>
-      <p:grpSpPr/>
+      <p:grpSpPr>
+        <a:xfrm>
+          <a:off x="0" y="0"/>
+          <a:ext cx="0" cy="0"/>
+          <a:chOff x="0" y="0"/>
+          <a:chExt cx="0" cy="0"/>
+        </a:xfrm>
+      </p:grpSpPr>
       <p:sp>
         <p:nvSpPr>
           <p:cNvPr id="2" name="Rectangle 1"/>
@@ -8849,6 +9447,7 @@
           <a:lstStyle/>
           <a:p>
             <a:pPr algn="ctr"/>
+            <a:endParaRPr/>
           </a:p>
         </p:txBody>
       </p:sp>
@@ -8929,6 +9528,7 @@
           <a:lstStyle/>
           <a:p>
             <a:pPr algn="ctr"/>
+            <a:endParaRPr/>
           </a:p>
         </p:txBody>
       </p:sp>
@@ -9409,6 +10009,7 @@
           <a:lstStyle/>
           <a:p>
             <a:pPr algn="ctr"/>
+            <a:endParaRPr/>
           </a:p>
         </p:txBody>
       </p:sp>
@@ -9560,6 +10161,7 @@
           <a:lstStyle/>
           <a:p>
             <a:pPr algn="ctr"/>
+            <a:endParaRPr/>
           </a:p>
         </p:txBody>
       </p:sp>
@@ -9959,4 +10561,299 @@
   </a:objectDefaults>
   <a:extraClrSchemeLst/>
 </a:theme>
+</file>
+
+<file path=ppt/theme/theme2.xml><?xml version="1.0" encoding="utf-8"?>
+<a:theme xmlns:a="http://schemas.openxmlformats.org/drawingml/2006/main" name="Office 主题​​">
+  <a:themeElements>
+    <a:clrScheme name="Office">
+      <a:dk1>
+        <a:sysClr val="windowText" lastClr="000000"/>
+      </a:dk1>
+      <a:lt1>
+        <a:sysClr val="window" lastClr="FFFFFF"/>
+      </a:lt1>
+      <a:dk2>
+        <a:srgbClr val="44546A"/>
+      </a:dk2>
+      <a:lt2>
+        <a:srgbClr val="E7E6E6"/>
+      </a:lt2>
+      <a:accent1>
+        <a:srgbClr val="4472C4"/>
+      </a:accent1>
+      <a:accent2>
+        <a:srgbClr val="ED7D31"/>
+      </a:accent2>
+      <a:accent3>
+        <a:srgbClr val="A5A5A5"/>
+      </a:accent3>
+      <a:accent4>
+        <a:srgbClr val="FFC000"/>
+      </a:accent4>
+      <a:accent5>
+        <a:srgbClr val="5B9BD5"/>
+      </a:accent5>
+      <a:accent6>
+        <a:srgbClr val="70AD47"/>
+      </a:accent6>
+      <a:hlink>
+        <a:srgbClr val="0563C1"/>
+      </a:hlink>
+      <a:folHlink>
+        <a:srgbClr val="954F72"/>
+      </a:folHlink>
+    </a:clrScheme>
+    <a:fontScheme name="Office">
+      <a:majorFont>
+        <a:latin typeface="等线 Light" panose="020F0302020204030204"/>
+        <a:ea typeface=""/>
+        <a:cs typeface=""/>
+        <a:font script="Jpan" typeface="游ゴシック Light"/>
+        <a:font script="Hang" typeface="맑은 고딕"/>
+        <a:font script="Hans" typeface="等线 Light"/>
+        <a:font script="Hant" typeface="新細明體"/>
+        <a:font script="Arab" typeface="Times New Roman"/>
+        <a:font script="Hebr" typeface="Times New Roman"/>
+        <a:font script="Thai" typeface="Angsana New"/>
+        <a:font script="Ethi" typeface="Nyala"/>
+        <a:font script="Beng" typeface="Vrinda"/>
+        <a:font script="Gujr" typeface="Shruti"/>
+        <a:font script="Khmr" typeface="MoolBoran"/>
+        <a:font script="Knda" typeface="Tunga"/>
+        <a:font script="Guru" typeface="Raavi"/>
+        <a:font script="Cans" typeface="Euphemia"/>
+        <a:font script="Cher" typeface="Plantagenet Cherokee"/>
+        <a:font script="Yiii" typeface="Microsoft Yi Baiti"/>
+        <a:font script="Tibt" typeface="Microsoft Himalaya"/>
+        <a:font script="Thaa" typeface="MV Boli"/>
+        <a:font script="Deva" typeface="Mangal"/>
+        <a:font script="Telu" typeface="Gautami"/>
+        <a:font script="Taml" typeface="Latha"/>
+        <a:font script="Syrc" typeface="Estrangelo Edessa"/>
+        <a:font script="Orya" typeface="Kalinga"/>
+        <a:font script="Mlym" typeface="Kartika"/>
+        <a:font script="Laoo" typeface="DokChampa"/>
+        <a:font script="Sinh" typeface="Iskoola Pota"/>
+        <a:font script="Mong" typeface="Mongolian Baiti"/>
+        <a:font script="Viet" typeface="Times New Roman"/>
+        <a:font script="Uigh" typeface="Microsoft Uighur"/>
+        <a:font script="Geor" typeface="Sylfaen"/>
+        <a:font script="Armn" typeface="Arial"/>
+        <a:font script="Bugi" typeface="Leelawadee UI"/>
+        <a:font script="Bopo" typeface="Microsoft JhengHei"/>
+        <a:font script="Java" typeface="Javanese Text"/>
+        <a:font script="Lisu" typeface="Segoe UI"/>
+        <a:font script="Mymr" typeface="Myanmar Text"/>
+        <a:font script="Nkoo" typeface="Ebrima"/>
+        <a:font script="Olck" typeface="Nirmala UI"/>
+        <a:font script="Osma" typeface="Ebrima"/>
+        <a:font script="Phag" typeface="Phagspa"/>
+        <a:font script="Syrn" typeface="Estrangelo Edessa"/>
+        <a:font script="Syrj" typeface="Estrangelo Edessa"/>
+        <a:font script="Syre" typeface="Estrangelo Edessa"/>
+        <a:font script="Sora" typeface="Nirmala UI"/>
+        <a:font script="Tale" typeface="Microsoft Tai Le"/>
+        <a:font script="Talu" typeface="Microsoft New Tai Lue"/>
+        <a:font script="Tfng" typeface="Ebrima"/>
+      </a:majorFont>
+      <a:minorFont>
+        <a:latin typeface="等线" panose="020F0502020204030204"/>
+        <a:ea typeface=""/>
+        <a:cs typeface=""/>
+        <a:font script="Jpan" typeface="游ゴシック"/>
+        <a:font script="Hang" typeface="맑은 고딕"/>
+        <a:font script="Hans" typeface="等线"/>
+        <a:font script="Hant" typeface="新細明體"/>
+        <a:font script="Arab" typeface="Arial"/>
+        <a:font script="Hebr" typeface="Arial"/>
+        <a:font script="Thai" typeface="Cordia New"/>
+        <a:font script="Ethi" typeface="Nyala"/>
+        <a:font script="Beng" typeface="Vrinda"/>
+        <a:font script="Gujr" typeface="Shruti"/>
+        <a:font script="Khmr" typeface="DaunPenh"/>
+        <a:font script="Knda" typeface="Tunga"/>
+        <a:font script="Guru" typeface="Raavi"/>
+        <a:font script="Cans" typeface="Euphemia"/>
+        <a:font script="Cher" typeface="Plantagenet Cherokee"/>
+        <a:font script="Yiii" typeface="Microsoft Yi Baiti"/>
+        <a:font script="Tibt" typeface="Microsoft Himalaya"/>
+        <a:font script="Thaa" typeface="MV Boli"/>
+        <a:font script="Deva" typeface="Mangal"/>
+        <a:font script="Telu" typeface="Gautami"/>
+        <a:font script="Taml" typeface="Latha"/>
+        <a:font script="Syrc" typeface="Estrangelo Edessa"/>
+        <a:font script="Orya" typeface="Kalinga"/>
+        <a:font script="Mlym" typeface="Kartika"/>
+        <a:font script="Laoo" typeface="DokChampa"/>
+        <a:font script="Sinh" typeface="Iskoola Pota"/>
+        <a:font script="Mong" typeface="Mongolian Baiti"/>
+        <a:font script="Viet" typeface="Arial"/>
+        <a:font script="Uigh" typeface="Microsoft Uighur"/>
+        <a:font script="Geor" typeface="Sylfaen"/>
+        <a:font script="Armn" typeface="Arial"/>
+        <a:font script="Bugi" typeface="Leelawadee UI"/>
+        <a:font script="Bopo" typeface="Microsoft JhengHei"/>
+        <a:font script="Java" typeface="Javanese Text"/>
+        <a:font script="Lisu" typeface="Segoe UI"/>
+        <a:font script="Mymr" typeface="Myanmar Text"/>
+        <a:font script="Nkoo" typeface="Ebrima"/>
+        <a:font script="Olck" typeface="Nirmala UI"/>
+        <a:font script="Osma" typeface="Ebrima"/>
+        <a:font script="Phag" typeface="Phagspa"/>
+        <a:font script="Syrn" typeface="Estrangelo Edessa"/>
+        <a:font script="Syrj" typeface="Estrangelo Edessa"/>
+        <a:font script="Syre" typeface="Estrangelo Edessa"/>
+        <a:font script="Sora" typeface="Nirmala UI"/>
+        <a:font script="Tale" typeface="Microsoft Tai Le"/>
+        <a:font script="Talu" typeface="Microsoft New Tai Lue"/>
+        <a:font script="Tfng" typeface="Ebrima"/>
+      </a:minorFont>
+    </a:fontScheme>
+    <a:fmtScheme name="Office">
+      <a:fillStyleLst>
+        <a:solidFill>
+          <a:schemeClr val="phClr"/>
+        </a:solidFill>
+        <a:gradFill rotWithShape="1">
+          <a:gsLst>
+            <a:gs pos="0">
+              <a:schemeClr val="phClr">
+                <a:lumMod val="110000"/>
+                <a:satMod val="105000"/>
+                <a:tint val="67000"/>
+              </a:schemeClr>
+            </a:gs>
+            <a:gs pos="50000">
+              <a:schemeClr val="phClr">
+                <a:lumMod val="105000"/>
+                <a:satMod val="103000"/>
+                <a:tint val="73000"/>
+              </a:schemeClr>
+            </a:gs>
+            <a:gs pos="100000">
+              <a:schemeClr val="phClr">
+                <a:lumMod val="105000"/>
+                <a:satMod val="109000"/>
+                <a:tint val="81000"/>
+              </a:schemeClr>
+            </a:gs>
+          </a:gsLst>
+          <a:lin ang="5400000" scaled="0"/>
+        </a:gradFill>
+        <a:gradFill rotWithShape="1">
+          <a:gsLst>
+            <a:gs pos="0">
+              <a:schemeClr val="phClr">
+                <a:satMod val="103000"/>
+                <a:lumMod val="102000"/>
+                <a:tint val="94000"/>
+              </a:schemeClr>
+            </a:gs>
+            <a:gs pos="50000">
+              <a:schemeClr val="phClr">
+                <a:satMod val="110000"/>
+                <a:lumMod val="100000"/>
+                <a:shade val="100000"/>
+              </a:schemeClr>
+            </a:gs>
+            <a:gs pos="100000">
+              <a:schemeClr val="phClr">
+                <a:lumMod val="99000"/>
+                <a:satMod val="120000"/>
+                <a:shade val="78000"/>
+              </a:schemeClr>
+            </a:gs>
+          </a:gsLst>
+          <a:lin ang="5400000" scaled="0"/>
+        </a:gradFill>
+      </a:fillStyleLst>
+      <a:lnStyleLst>
+        <a:ln w="6350" cap="flat" cmpd="sng" algn="ctr">
+          <a:solidFill>
+            <a:schemeClr val="phClr"/>
+          </a:solidFill>
+          <a:prstDash val="solid"/>
+          <a:miter lim="800000"/>
+        </a:ln>
+        <a:ln w="12700" cap="flat" cmpd="sng" algn="ctr">
+          <a:solidFill>
+            <a:schemeClr val="phClr"/>
+          </a:solidFill>
+          <a:prstDash val="solid"/>
+          <a:miter lim="800000"/>
+        </a:ln>
+        <a:ln w="19050" cap="flat" cmpd="sng" algn="ctr">
+          <a:solidFill>
+            <a:schemeClr val="phClr"/>
+          </a:solidFill>
+          <a:prstDash val="solid"/>
+          <a:miter lim="800000"/>
+        </a:ln>
+      </a:lnStyleLst>
+      <a:effectStyleLst>
+        <a:effectStyle>
+          <a:effectLst/>
+        </a:effectStyle>
+        <a:effectStyle>
+          <a:effectLst/>
+        </a:effectStyle>
+        <a:effectStyle>
+          <a:effectLst>
+            <a:outerShdw blurRad="57150" dist="19050" dir="5400000" algn="ctr" rotWithShape="0">
+              <a:srgbClr val="000000">
+                <a:alpha val="63000"/>
+              </a:srgbClr>
+            </a:outerShdw>
+          </a:effectLst>
+        </a:effectStyle>
+      </a:effectStyleLst>
+      <a:bgFillStyleLst>
+        <a:solidFill>
+          <a:schemeClr val="phClr"/>
+        </a:solidFill>
+        <a:solidFill>
+          <a:schemeClr val="phClr">
+            <a:tint val="95000"/>
+            <a:satMod val="170000"/>
+          </a:schemeClr>
+        </a:solidFill>
+        <a:gradFill rotWithShape="1">
+          <a:gsLst>
+            <a:gs pos="0">
+              <a:schemeClr val="phClr">
+                <a:tint val="93000"/>
+                <a:satMod val="150000"/>
+                <a:shade val="98000"/>
+                <a:lumMod val="102000"/>
+              </a:schemeClr>
+            </a:gs>
+            <a:gs pos="50000">
+              <a:schemeClr val="phClr">
+                <a:tint val="98000"/>
+                <a:satMod val="130000"/>
+                <a:shade val="90000"/>
+                <a:lumMod val="103000"/>
+              </a:schemeClr>
+            </a:gs>
+            <a:gs pos="100000">
+              <a:schemeClr val="phClr">
+                <a:shade val="63000"/>
+                <a:satMod val="120000"/>
+              </a:schemeClr>
+            </a:gs>
+          </a:gsLst>
+          <a:lin ang="5400000" scaled="0"/>
+        </a:gradFill>
+      </a:bgFillStyleLst>
+    </a:fmtScheme>
+  </a:themeElements>
+  <a:objectDefaults/>
+  <a:extraClrSchemeLst/>
+  <a:extLst>
+    <a:ext uri="{05A4C25C-085E-4340-85A3-A5531E510DB2}">
+      <thm15:themeFamily xmlns:thm15="http://schemas.microsoft.com/office/thememl/2012/main" name="Office Theme" id="{62F939B6-93AF-4DB8-9C6B-D6C7DFDC589F}" vid="{4A3C46E8-61CC-4603-A589-7422A47A8E4A}"/>
+    </a:ext>
+  </a:extLst>
+</a:theme>
 </file>